--- a/Group-Project-1.pptx
+++ b/Group-Project-1.pptx
@@ -12,8 +12,8 @@
     <p:sldId id="264" r:id="rId6"/>
     <p:sldId id="262" r:id="rId7"/>
     <p:sldId id="259" r:id="rId8"/>
-    <p:sldId id="261" r:id="rId9"/>
-    <p:sldId id="263" r:id="rId10"/>
+    <p:sldId id="263" r:id="rId9"/>
+    <p:sldId id="261" r:id="rId10"/>
     <p:sldId id="265" r:id="rId11"/>
     <p:sldId id="266" r:id="rId12"/>
     <p:sldId id="267" r:id="rId13"/>
@@ -128,8 +128,8 @@
             <p14:sldId id="264"/>
             <p14:sldId id="262"/>
             <p14:sldId id="259"/>
+            <p14:sldId id="263"/>
             <p14:sldId id="261"/>
-            <p14:sldId id="263"/>
             <p14:sldId id="265"/>
             <p14:sldId id="266"/>
             <p14:sldId id="267"/>
@@ -146,8 +146,8 @@
 <pc:chgInfo xmlns:a="http://schemas.openxmlformats.org/drawingml/2006/main" xmlns:r="http://schemas.openxmlformats.org/officeDocument/2006/relationships" xmlns:ac="http://schemas.microsoft.com/office/drawing/2013/main/command" xmlns:pc="http://schemas.microsoft.com/office/powerpoint/2013/main/command">
   <pc:docChgLst>
     <pc:chgData name="Jesus Guerrero" userId="491912c3aa4fa2a1" providerId="LiveId" clId="{768EA364-A5D1-400D-9F32-56A2EEB862E3}"/>
-    <pc:docChg chg="undo custSel addSld modSld sldOrd modSection">
-      <pc:chgData name="Jesus Guerrero" userId="491912c3aa4fa2a1" providerId="LiveId" clId="{768EA364-A5D1-400D-9F32-56A2EEB862E3}" dt="2025-10-23T03:01:15.266" v="431" actId="478"/>
+    <pc:docChg chg="undo custSel addSld delSld modSld sldOrd modSection">
+      <pc:chgData name="Jesus Guerrero" userId="491912c3aa4fa2a1" providerId="LiveId" clId="{768EA364-A5D1-400D-9F32-56A2EEB862E3}" dt="2025-10-23T03:19:21.606" v="436" actId="478"/>
       <pc:docMkLst>
         <pc:docMk/>
       </pc:docMkLst>
@@ -230,12 +230,20 @@
           </ac:picMkLst>
         </pc:picChg>
       </pc:sldChg>
-      <pc:sldChg chg="modSp mod">
-        <pc:chgData name="Jesus Guerrero" userId="491912c3aa4fa2a1" providerId="LiveId" clId="{768EA364-A5D1-400D-9F32-56A2EEB862E3}" dt="2025-10-23T02:59:55.292" v="429" actId="1076"/>
+      <pc:sldChg chg="delSp modSp mod">
+        <pc:chgData name="Jesus Guerrero" userId="491912c3aa4fa2a1" providerId="LiveId" clId="{768EA364-A5D1-400D-9F32-56A2EEB862E3}" dt="2025-10-23T03:19:21.606" v="436" actId="478"/>
         <pc:sldMkLst>
           <pc:docMk/>
           <pc:sldMk cId="2015522951" sldId="260"/>
         </pc:sldMkLst>
+        <pc:spChg chg="del">
+          <ac:chgData name="Jesus Guerrero" userId="491912c3aa4fa2a1" providerId="LiveId" clId="{768EA364-A5D1-400D-9F32-56A2EEB862E3}" dt="2025-10-23T03:19:21.606" v="436" actId="478"/>
+          <ac:spMkLst>
+            <pc:docMk/>
+            <pc:sldMk cId="2015522951" sldId="260"/>
+            <ac:spMk id="3" creationId="{78F3524A-1FC4-1C7B-C332-FF8EA26A16E1}"/>
+          </ac:spMkLst>
+        </pc:spChg>
         <pc:picChg chg="mod modCrop">
           <ac:chgData name="Jesus Guerrero" userId="491912c3aa4fa2a1" providerId="LiveId" clId="{768EA364-A5D1-400D-9F32-56A2EEB862E3}" dt="2025-10-23T02:59:55.292" v="429" actId="1076"/>
           <ac:picMkLst>
@@ -245,8 +253,8 @@
           </ac:picMkLst>
         </pc:picChg>
       </pc:sldChg>
-      <pc:sldChg chg="addSp delSp modSp mod">
-        <pc:chgData name="Jesus Guerrero" userId="491912c3aa4fa2a1" providerId="LiveId" clId="{768EA364-A5D1-400D-9F32-56A2EEB862E3}" dt="2025-10-23T03:01:15.266" v="431" actId="478"/>
+      <pc:sldChg chg="addSp delSp modSp mod ord">
+        <pc:chgData name="Jesus Guerrero" userId="491912c3aa4fa2a1" providerId="LiveId" clId="{768EA364-A5D1-400D-9F32-56A2EEB862E3}" dt="2025-10-23T03:10:09.103" v="433"/>
         <pc:sldMkLst>
           <pc:docMk/>
           <pc:sldMk cId="777690836" sldId="263"/>
@@ -440,6 +448,13 @@
             <ac:picMk id="18" creationId="{46FA0FFA-8347-D0D6-93B2-C1CCFC7EF789}"/>
           </ac:picMkLst>
         </pc:picChg>
+      </pc:sldChg>
+      <pc:sldChg chg="new del">
+        <pc:chgData name="Jesus Guerrero" userId="491912c3aa4fa2a1" providerId="LiveId" clId="{768EA364-A5D1-400D-9F32-56A2EEB862E3}" dt="2025-10-23T03:15:00.677" v="435" actId="680"/>
+        <pc:sldMkLst>
+          <pc:docMk/>
+          <pc:sldMk cId="2300561462" sldId="269"/>
+        </pc:sldMkLst>
       </pc:sldChg>
     </pc:docChg>
   </pc:docChgLst>
@@ -5128,7 +5143,7 @@
           <a:lstStyle/>
           <a:p>
             <a:r>
-              <a:rPr lang="en-US"/>
+              <a:rPr lang="en-US" dirty="0"/>
               <a:t>USER</a:t>
             </a:r>
           </a:p>
@@ -5554,31 +5569,6 @@
           </a:xfrm>
         </p:spPr>
       </p:pic>
-      <p:sp>
-        <p:nvSpPr>
-          <p:cNvPr id="3" name="Content Placeholder 2">
-            <a:extLst>
-              <a:ext uri="{FF2B5EF4-FFF2-40B4-BE49-F238E27FC236}">
-                <a16:creationId xmlns:a16="http://schemas.microsoft.com/office/drawing/2014/main" id="{78F3524A-1FC4-1C7B-C332-FF8EA26A16E1}"/>
-              </a:ext>
-            </a:extLst>
-          </p:cNvPr>
-          <p:cNvSpPr>
-            <a:spLocks noGrp="1"/>
-          </p:cNvSpPr>
-          <p:nvPr>
-            <p:ph type="body" sz="half" idx="2"/>
-          </p:nvPr>
-        </p:nvSpPr>
-        <p:spPr/>
-        <p:txBody>
-          <a:bodyPr/>
-          <a:lstStyle/>
-          <a:p>
-            <a:endParaRPr lang="en-US" dirty="0"/>
-          </a:p>
-        </p:txBody>
-      </p:sp>
     </p:spTree>
     <p:extLst>
       <p:ext uri="{BB962C8B-B14F-4D97-AF65-F5344CB8AC3E}">
@@ -5963,10 +5953,10 @@
       </p:grpSpPr>
       <p:sp>
         <p:nvSpPr>
-          <p:cNvPr id="5" name="Title 4">
-            <a:extLst>
-              <a:ext uri="{FF2B5EF4-FFF2-40B4-BE49-F238E27FC236}">
-                <a16:creationId xmlns:a16="http://schemas.microsoft.com/office/drawing/2014/main" id="{10E0F5E0-B294-9721-08A6-998E189C4C9B}"/>
+          <p:cNvPr id="2" name="Title 1">
+            <a:extLst>
+              <a:ext uri="{FF2B5EF4-FFF2-40B4-BE49-F238E27FC236}">
+                <a16:creationId xmlns:a16="http://schemas.microsoft.com/office/drawing/2014/main" id="{E62C8430-480C-0B17-3D2D-163041ED6103}"/>
               </a:ext>
             </a:extLst>
           </p:cNvPr>
@@ -5984,17 +5974,42 @@
           <a:p>
             <a:r>
               <a:rPr lang="en-US" dirty="0"/>
-              <a:t>Popular Flavors Selection</a:t>
-            </a:r>
+              <a:t>Ice Cream Selection Visualizer</a:t>
+            </a:r>
+          </a:p>
+        </p:txBody>
+      </p:sp>
+      <p:sp>
+        <p:nvSpPr>
+          <p:cNvPr id="4" name="Text Placeholder 3">
+            <a:extLst>
+              <a:ext uri="{FF2B5EF4-FFF2-40B4-BE49-F238E27FC236}">
+                <a16:creationId xmlns:a16="http://schemas.microsoft.com/office/drawing/2014/main" id="{529C567C-C507-A7CD-0180-38C1F691260E}"/>
+              </a:ext>
+            </a:extLst>
+          </p:cNvPr>
+          <p:cNvSpPr>
+            <a:spLocks noGrp="1"/>
+          </p:cNvSpPr>
+          <p:nvPr>
+            <p:ph type="body" sz="half" idx="2"/>
+          </p:nvPr>
+        </p:nvSpPr>
+        <p:spPr/>
+        <p:txBody>
+          <a:bodyPr/>
+          <a:lstStyle/>
+          <a:p>
+            <a:endParaRPr lang="en-US" dirty="0"/>
           </a:p>
         </p:txBody>
       </p:sp>
       <p:pic>
         <p:nvPicPr>
-          <p:cNvPr id="10" name="Picture 9">
-            <a:extLst>
-              <a:ext uri="{FF2B5EF4-FFF2-40B4-BE49-F238E27FC236}">
-                <a16:creationId xmlns:a16="http://schemas.microsoft.com/office/drawing/2014/main" id="{B109C5B4-4782-9661-EC69-4C6A54DC3400}"/>
+          <p:cNvPr id="9" name="Picture 8">
+            <a:extLst>
+              <a:ext uri="{FF2B5EF4-FFF2-40B4-BE49-F238E27FC236}">
+                <a16:creationId xmlns:a16="http://schemas.microsoft.com/office/drawing/2014/main" id="{3D5407AA-5B43-60F8-B73D-9E37EAFF39BC}"/>
               </a:ext>
             </a:extLst>
           </p:cNvPr>
@@ -6011,8 +6026,8 @@
         </p:blipFill>
         <p:spPr>
           <a:xfrm>
-            <a:off x="6363984" y="978408"/>
-            <a:ext cx="1607455" cy="5484695"/>
+            <a:off x="521208" y="3438144"/>
+            <a:ext cx="7154273" cy="3124636"/>
           </a:xfrm>
           <a:prstGeom prst="rect">
             <a:avLst/>
@@ -6021,10 +6036,10 @@
       </p:pic>
       <p:pic>
         <p:nvPicPr>
-          <p:cNvPr id="12" name="Picture 11">
-            <a:extLst>
-              <a:ext uri="{FF2B5EF4-FFF2-40B4-BE49-F238E27FC236}">
-                <a16:creationId xmlns:a16="http://schemas.microsoft.com/office/drawing/2014/main" id="{8C81297F-D9AB-6A31-9EBD-C6A191E515FA}"/>
+          <p:cNvPr id="13" name="Picture 12">
+            <a:extLst>
+              <a:ext uri="{FF2B5EF4-FFF2-40B4-BE49-F238E27FC236}">
+                <a16:creationId xmlns:a16="http://schemas.microsoft.com/office/drawing/2014/main" id="{4BE9E247-80E1-8979-3DED-1963252C1B60}"/>
               </a:ext>
             </a:extLst>
           </p:cNvPr>
@@ -6041,8 +6056,8 @@
         </p:blipFill>
         <p:spPr>
           <a:xfrm>
-            <a:off x="521208" y="2986073"/>
-            <a:ext cx="5639587" cy="3458058"/>
+            <a:off x="5672329" y="978408"/>
+            <a:ext cx="1991549" cy="2349477"/>
           </a:xfrm>
           <a:prstGeom prst="rect">
             <a:avLst/>
@@ -6051,10 +6066,10 @@
       </p:pic>
       <p:pic>
         <p:nvPicPr>
-          <p:cNvPr id="14" name="Picture 13">
-            <a:extLst>
-              <a:ext uri="{FF2B5EF4-FFF2-40B4-BE49-F238E27FC236}">
-                <a16:creationId xmlns:a16="http://schemas.microsoft.com/office/drawing/2014/main" id="{ED3EE75A-53C0-C5BD-13BB-08C272635452}"/>
+          <p:cNvPr id="17" name="Picture 16">
+            <a:extLst>
+              <a:ext uri="{FF2B5EF4-FFF2-40B4-BE49-F238E27FC236}">
+                <a16:creationId xmlns:a16="http://schemas.microsoft.com/office/drawing/2014/main" id="{19503F9F-AA6C-9C3E-57E4-3B40CD217C8A}"/>
               </a:ext>
             </a:extLst>
           </p:cNvPr>
@@ -6071,8 +6086,8 @@
         </p:blipFill>
         <p:spPr>
           <a:xfrm>
-            <a:off x="8174629" y="1153409"/>
-            <a:ext cx="3496163" cy="5134692"/>
+            <a:off x="8090212" y="1983185"/>
+            <a:ext cx="3366862" cy="3366862"/>
           </a:xfrm>
           <a:prstGeom prst="rect">
             <a:avLst/>
@@ -6082,7 +6097,7 @@
     </p:spTree>
     <p:extLst>
       <p:ext uri="{BB962C8B-B14F-4D97-AF65-F5344CB8AC3E}">
-        <p14:creationId xmlns:p14="http://schemas.microsoft.com/office/powerpoint/2010/main" val="1035406947"/>
+        <p14:creationId xmlns:p14="http://schemas.microsoft.com/office/powerpoint/2010/main" val="777690836"/>
       </p:ext>
     </p:extLst>
   </p:cSld>
@@ -6111,10 +6126,10 @@
       </p:grpSpPr>
       <p:sp>
         <p:nvSpPr>
-          <p:cNvPr id="2" name="Title 1">
-            <a:extLst>
-              <a:ext uri="{FF2B5EF4-FFF2-40B4-BE49-F238E27FC236}">
-                <a16:creationId xmlns:a16="http://schemas.microsoft.com/office/drawing/2014/main" id="{E62C8430-480C-0B17-3D2D-163041ED6103}"/>
+          <p:cNvPr id="5" name="Title 4">
+            <a:extLst>
+              <a:ext uri="{FF2B5EF4-FFF2-40B4-BE49-F238E27FC236}">
+                <a16:creationId xmlns:a16="http://schemas.microsoft.com/office/drawing/2014/main" id="{10E0F5E0-B294-9721-08A6-998E189C4C9B}"/>
               </a:ext>
             </a:extLst>
           </p:cNvPr>
@@ -6132,42 +6147,17 @@
           <a:p>
             <a:r>
               <a:rPr lang="en-US" dirty="0"/>
-              <a:t>Ice Cream Selection Visualizer</a:t>
-            </a:r>
-          </a:p>
-        </p:txBody>
-      </p:sp>
-      <p:sp>
-        <p:nvSpPr>
-          <p:cNvPr id="4" name="Text Placeholder 3">
-            <a:extLst>
-              <a:ext uri="{FF2B5EF4-FFF2-40B4-BE49-F238E27FC236}">
-                <a16:creationId xmlns:a16="http://schemas.microsoft.com/office/drawing/2014/main" id="{529C567C-C507-A7CD-0180-38C1F691260E}"/>
-              </a:ext>
-            </a:extLst>
-          </p:cNvPr>
-          <p:cNvSpPr>
-            <a:spLocks noGrp="1"/>
-          </p:cNvSpPr>
-          <p:nvPr>
-            <p:ph type="body" sz="half" idx="2"/>
-          </p:nvPr>
-        </p:nvSpPr>
-        <p:spPr/>
-        <p:txBody>
-          <a:bodyPr/>
-          <a:lstStyle/>
-          <a:p>
-            <a:endParaRPr lang="en-US" dirty="0"/>
+              <a:t>Popular Flavors Selection</a:t>
+            </a:r>
           </a:p>
         </p:txBody>
       </p:sp>
       <p:pic>
         <p:nvPicPr>
-          <p:cNvPr id="9" name="Picture 8">
-            <a:extLst>
-              <a:ext uri="{FF2B5EF4-FFF2-40B4-BE49-F238E27FC236}">
-                <a16:creationId xmlns:a16="http://schemas.microsoft.com/office/drawing/2014/main" id="{3D5407AA-5B43-60F8-B73D-9E37EAFF39BC}"/>
+          <p:cNvPr id="10" name="Picture 9">
+            <a:extLst>
+              <a:ext uri="{FF2B5EF4-FFF2-40B4-BE49-F238E27FC236}">
+                <a16:creationId xmlns:a16="http://schemas.microsoft.com/office/drawing/2014/main" id="{B109C5B4-4782-9661-EC69-4C6A54DC3400}"/>
               </a:ext>
             </a:extLst>
           </p:cNvPr>
@@ -6184,8 +6174,8 @@
         </p:blipFill>
         <p:spPr>
           <a:xfrm>
-            <a:off x="521208" y="3438144"/>
-            <a:ext cx="7154273" cy="3124636"/>
+            <a:off x="6363984" y="978408"/>
+            <a:ext cx="1607455" cy="5484695"/>
           </a:xfrm>
           <a:prstGeom prst="rect">
             <a:avLst/>
@@ -6194,10 +6184,10 @@
       </p:pic>
       <p:pic>
         <p:nvPicPr>
-          <p:cNvPr id="13" name="Picture 12">
-            <a:extLst>
-              <a:ext uri="{FF2B5EF4-FFF2-40B4-BE49-F238E27FC236}">
-                <a16:creationId xmlns:a16="http://schemas.microsoft.com/office/drawing/2014/main" id="{4BE9E247-80E1-8979-3DED-1963252C1B60}"/>
+          <p:cNvPr id="12" name="Picture 11">
+            <a:extLst>
+              <a:ext uri="{FF2B5EF4-FFF2-40B4-BE49-F238E27FC236}">
+                <a16:creationId xmlns:a16="http://schemas.microsoft.com/office/drawing/2014/main" id="{8C81297F-D9AB-6A31-9EBD-C6A191E515FA}"/>
               </a:ext>
             </a:extLst>
           </p:cNvPr>
@@ -6214,8 +6204,8 @@
         </p:blipFill>
         <p:spPr>
           <a:xfrm>
-            <a:off x="5672329" y="978408"/>
-            <a:ext cx="1991549" cy="2349477"/>
+            <a:off x="521208" y="2986073"/>
+            <a:ext cx="5639587" cy="3458058"/>
           </a:xfrm>
           <a:prstGeom prst="rect">
             <a:avLst/>
@@ -6224,10 +6214,10 @@
       </p:pic>
       <p:pic>
         <p:nvPicPr>
-          <p:cNvPr id="17" name="Picture 16">
-            <a:extLst>
-              <a:ext uri="{FF2B5EF4-FFF2-40B4-BE49-F238E27FC236}">
-                <a16:creationId xmlns:a16="http://schemas.microsoft.com/office/drawing/2014/main" id="{19503F9F-AA6C-9C3E-57E4-3B40CD217C8A}"/>
+          <p:cNvPr id="14" name="Picture 13">
+            <a:extLst>
+              <a:ext uri="{FF2B5EF4-FFF2-40B4-BE49-F238E27FC236}">
+                <a16:creationId xmlns:a16="http://schemas.microsoft.com/office/drawing/2014/main" id="{ED3EE75A-53C0-C5BD-13BB-08C272635452}"/>
               </a:ext>
             </a:extLst>
           </p:cNvPr>
@@ -6244,8 +6234,8 @@
         </p:blipFill>
         <p:spPr>
           <a:xfrm>
-            <a:off x="8090212" y="1983185"/>
-            <a:ext cx="3366862" cy="3366862"/>
+            <a:off x="8174629" y="1153409"/>
+            <a:ext cx="3496163" cy="5134692"/>
           </a:xfrm>
           <a:prstGeom prst="rect">
             <a:avLst/>
@@ -6255,7 +6245,7 @@
     </p:spTree>
     <p:extLst>
       <p:ext uri="{BB962C8B-B14F-4D97-AF65-F5344CB8AC3E}">
-        <p14:creationId xmlns:p14="http://schemas.microsoft.com/office/powerpoint/2010/main" val="777690836"/>
+        <p14:creationId xmlns:p14="http://schemas.microsoft.com/office/powerpoint/2010/main" val="1035406947"/>
       </p:ext>
     </p:extLst>
   </p:cSld>
